--- a/Taller_7/PPT/Taller_Pobreza_ENAHO.pptx
+++ b/Taller_7/PPT/Taller_Pobreza_ENAHO.pptx
@@ -7203,7 +7203,7 @@
                 <a:ea typeface="Calibri" pitchFamily="34" charset="-122"/>
                 <a:cs typeface="Calibri" pitchFamily="34" charset="-120"/>
               </a:rPr>
-              <a:t>Por qué es defendible</a:t>
+              <a:t>Y lo COMPROBAMOS, no lo supusimos</a:t>
             </a:r>
             <a:endParaRPr lang="en-US" sz="1250" dirty="0"/>
           </a:p>
@@ -7245,7 +7245,7 @@
                 <a:ea typeface="Calibri" pitchFamily="34" charset="-122"/>
                 <a:cs typeface="Calibri" pitchFamily="34" charset="-120"/>
               </a:rPr>
-              <a:t>La correlación positiva entre años reduce la varianza real de la diferencia, así que nuestro error estándar está algo SOBREestimado: somos conservadores.</a:t>
+              <a:t>Medimos la correlación de la pobreza en los hogares del panel: r = 0.44, positiva. Por eso asumir independencia sobreestima el EE y la prueba es conservadora. Afirmarlo sin medirlo habría sido el mismo error que este curso combate.</a:t>
             </a:r>
             <a:endParaRPr lang="en-US" sz="1150" dirty="0"/>
           </a:p>
@@ -7934,7 +7934,7 @@
                 <a:ea typeface="Calibri" pitchFamily="34" charset="-122"/>
                 <a:cs typeface="Calibri" pitchFamily="34" charset="-120"/>
               </a:rPr>
-              <a:t>«27.6 % (IC 95 %: 26.5 a 28.6 %), con DEFF = 5.8 y n efectivo de 5 845 hogares. La caída de 1.5 pp respecto a 2023 alcanza significancia al 5 % por margen estrecho (z = −2.00, p = 0.046); el IC de la caída admite desde 2.9 pp hasta prácticamente cero.»</a:t>
+              <a:t>«27.6 % (IC 95 %: 26.5 a 28.6 %), con DEFF = 4.7 y n efectivo de 7 238 hogares. La caída de 1.5 pp respecto a 2023 alcanza significancia al 5 % por margen estrecho (z = −2.00, p = 0.046); el IC de la caída admite desde 2.9 pp hasta prácticamente cero.»</a:t>
             </a:r>
             <a:endParaRPr lang="en-US" sz="1050" dirty="0"/>
           </a:p>
@@ -11728,7 +11728,7 @@
                 <a:ea typeface="Calibri" pitchFamily="34" charset="-122"/>
                 <a:cs typeface="Calibri" pitchFamily="34" charset="-120"/>
               </a:rPr>
-              <a:t>DEFF 5.76</a:t>
+              <a:t>DEFF ≈ 4.66</a:t>
             </a:r>
             <a:endParaRPr lang="en-US" sz="1200" dirty="0"/>
           </a:p>
@@ -11767,7 +11767,7 @@
                 <a:ea typeface="Calibri" pitchFamily="34" charset="-122"/>
                 <a:cs typeface="Calibri" pitchFamily="34" charset="-120"/>
               </a:rPr>
-              <a:t>n efectivo 5 845 de 33 691</a:t>
+              <a:t>n efectivo 7 238 de 33 691</a:t>
             </a:r>
             <a:endParaRPr lang="en-US" sz="1050" dirty="0"/>
           </a:p>
@@ -11853,7 +11853,85 @@
       </p:sp>
       <p:sp>
         <p:nvSpPr>
-          <p:cNvPr id="115" name="Shape 113"/>
+          <p:cNvPr id="115" name="Text 113"/>
+          <p:cNvSpPr/>
+          <p:nvPr/>
+        </p:nvSpPr>
+        <p:spPr>
+          <a:xfrm>
+            <a:off x="804672" y="4626864"/>
+            <a:ext cx="1828800" cy="329184"/>
+          </a:xfrm>
+          <a:prstGeom prst="rect">
+            <a:avLst/>
+          </a:prstGeom>
+          <a:noFill/>
+          <a:ln/>
+        </p:spPr>
+        <p:txBody>
+          <a:bodyPr wrap="square" lIns="0" tIns="0" rIns="0" bIns="0" rtlCol="0" anchor="ctr"/>
+          <a:lstStyle/>
+          <a:p>
+            <a:pPr indent="0" marL="0">
+              <a:buNone/>
+            </a:pPr>
+            <a:r>
+              <a:rPr lang="en-US" sz="1200" b="1" dirty="0">
+                <a:solidFill>
+                  <a:srgbClr val="E6115E"/>
+                </a:solidFill>
+                <a:latin typeface="Calibri" pitchFamily="34" charset="0"/>
+                <a:ea typeface="Calibri" pitchFamily="34" charset="-122"/>
+                <a:cs typeface="Calibri" pitchFamily="34" charset="-120"/>
+              </a:rPr>
+              <a:t>fronterizo</a:t>
+            </a:r>
+            <a:endParaRPr lang="en-US" sz="1200" dirty="0"/>
+          </a:p>
+        </p:txBody>
+      </p:sp>
+      <p:sp>
+        <p:nvSpPr>
+          <p:cNvPr id="116" name="Text 114"/>
+          <p:cNvSpPr/>
+          <p:nvPr/>
+        </p:nvSpPr>
+        <p:spPr>
+          <a:xfrm>
+            <a:off x="2697480" y="4626864"/>
+            <a:ext cx="3108960" cy="329184"/>
+          </a:xfrm>
+          <a:prstGeom prst="rect">
+            <a:avLst/>
+          </a:prstGeom>
+          <a:noFill/>
+          <a:ln/>
+        </p:spPr>
+        <p:txBody>
+          <a:bodyPr wrap="square" lIns="0" tIns="0" rIns="0" bIns="0" rtlCol="0" anchor="ctr"/>
+          <a:lstStyle/>
+          <a:p>
+            <a:pPr indent="0" marL="0">
+              <a:buNone/>
+            </a:pPr>
+            <a:r>
+              <a:rPr lang="en-US" sz="1050" dirty="0">
+                <a:solidFill>
+                  <a:srgbClr val="C9D6F2"/>
+                </a:solidFill>
+                <a:latin typeface="Calibri" pitchFamily="34" charset="0"/>
+                <a:ea typeface="Calibri" pitchFamily="34" charset="-122"/>
+                <a:cs typeface="Calibri" pitchFamily="34" charset="-120"/>
+              </a:rPr>
+              <a:t>y con la covarianza del panel, 0.034</a:t>
+            </a:r>
+            <a:endParaRPr lang="en-US" sz="1050" dirty="0"/>
+          </a:p>
+        </p:txBody>
+      </p:sp>
+      <p:sp>
+        <p:nvSpPr>
+          <p:cNvPr id="117" name="Shape 115"/>
           <p:cNvSpPr/>
           <p:nvPr/>
         </p:nvSpPr>
@@ -11880,7 +11958,7 @@
       </p:sp>
       <p:sp>
         <p:nvSpPr>
-          <p:cNvPr id="116" name="Shape 114"/>
+          <p:cNvPr id="118" name="Shape 116"/>
           <p:cNvSpPr/>
           <p:nvPr/>
         </p:nvSpPr>
@@ -11907,7 +11985,7 @@
       </p:sp>
       <p:sp>
         <p:nvSpPr>
-          <p:cNvPr id="117" name="Text 115"/>
+          <p:cNvPr id="119" name="Text 117"/>
           <p:cNvSpPr/>
           <p:nvPr/>
         </p:nvSpPr>
@@ -11946,7 +12024,7 @@
       </p:sp>
       <p:sp>
         <p:nvSpPr>
-          <p:cNvPr id="118" name="Text 116"/>
+          <p:cNvPr id="120" name="Text 118"/>
           <p:cNvSpPr/>
           <p:nvPr/>
         </p:nvSpPr>
@@ -12046,7 +12124,7 @@
       </p:sp>
       <p:sp>
         <p:nvSpPr>
-          <p:cNvPr id="119" name="Shape 117"/>
+          <p:cNvPr id="121" name="Shape 119"/>
           <p:cNvSpPr/>
           <p:nvPr/>
         </p:nvSpPr>
@@ -12073,7 +12151,7 @@
       </p:sp>
       <p:sp>
         <p:nvSpPr>
-          <p:cNvPr id="120" name="Shape 118"/>
+          <p:cNvPr id="122" name="Shape 120"/>
           <p:cNvSpPr/>
           <p:nvPr/>
         </p:nvSpPr>
@@ -12100,7 +12178,7 @@
       </p:sp>
       <p:sp>
         <p:nvSpPr>
-          <p:cNvPr id="121" name="Text 119"/>
+          <p:cNvPr id="123" name="Text 121"/>
           <p:cNvSpPr/>
           <p:nvPr/>
         </p:nvSpPr>
@@ -12139,7 +12217,7 @@
       </p:sp>
       <p:sp>
         <p:nvSpPr>
-          <p:cNvPr id="122" name="Text 120"/>
+          <p:cNvPr id="124" name="Text 122"/>
           <p:cNvSpPr/>
           <p:nvPr/>
         </p:nvSpPr>
@@ -12173,7 +12251,7 @@
                 <a:ea typeface="Calibri" pitchFamily="34" charset="-122"/>
                 <a:cs typeface="Calibri" pitchFamily="34" charset="-120"/>
               </a:rPr>
-              <a:t>Las seis clases anteriores no fueron ejercicios de pizarra. Cada una apareció hoy con datos del INEI, y en cada punto la decisión metodológica cambió la respuesta: ignorar los pesos movía la cifra 7.4 puntos; ignorar el diseño hacía el intervalo 2.4 veces más angosto, y convertía una caída dudosa en un titular contundente.</a:t>
+              <a:t>Las seis clases anteriores no fueron ejercicios de pizarra. Cada una apareció hoy con datos del INEI, y en cada punto la decisión metodológica cambió la respuesta: ignorar los pesos movía la cifra 7.4 puntos; ignorar el diseño hacía el intervalo 2.2 veces más angosto, y convertía una caída fronteriza en un titular contundente.</a:t>
             </a:r>
             <a:endParaRPr lang="en-US" sz="1250" dirty="0"/>
           </a:p>
@@ -12181,7 +12259,7 @@
       </p:sp>
       <p:sp>
         <p:nvSpPr>
-          <p:cNvPr id="123" name="Text 121"/>
+          <p:cNvPr id="125" name="Text 123"/>
           <p:cNvSpPr/>
           <p:nvPr/>
         </p:nvSpPr>
@@ -17377,7 +17455,7 @@
                 <a:ea typeface="Calibri" pitchFamily="34" charset="-122"/>
                 <a:cs typeface="Calibri" pitchFamily="34" charset="-120"/>
               </a:rPr>
-              <a:t>Y de paso reviven la lognormal de la Clase 3 y el cuantil de la Clase 2, con datos del INEI.</a:t>
+              <a:t>Y de paso revive la lognormal de la Clase 3, con datos reales del INEI.</a:t>
             </a:r>
             <a:endParaRPr lang="en-US" sz="1400" dirty="0"/>
           </a:p>
@@ -17869,7 +17947,7 @@
                 <a:ea typeface="Calibri" pitchFamily="34" charset="-122"/>
                 <a:cs typeface="Calibri" pitchFamily="34" charset="-120"/>
               </a:rPr>
-              <a:t>La línea NO es un número único: tiene 82 valores, de S/ 316 a S/ 559 según el dominio.</a:t>
+              <a:t>Un UMBRAL, no un cuantil: es el costo de una canasta básica. Tiene 82 valores, de S/ 316 a S/ 559.</a:t>
             </a:r>
             <a:endParaRPr lang="en-US" sz="1100" dirty="0"/>
           </a:p>
@@ -18311,7 +18389,7 @@
                 <a:ea typeface="Calibri" pitchFamily="34" charset="-122"/>
                 <a:cs typeface="Calibri" pitchFamily="34" charset="-120"/>
               </a:rPr>
-              <a:t>S/ 681</a:t>
+              <a:t>S/ 637</a:t>
             </a:r>
             <a:endParaRPr lang="en-US" sz="3400" dirty="0"/>
           </a:p>
@@ -18350,7 +18428,7 @@
                 <a:ea typeface="Calibri" pitchFamily="34" charset="-122"/>
                 <a:cs typeface="Calibri" pitchFamily="34" charset="-120"/>
               </a:rPr>
-              <a:t>la mediana del gasto per cápita</a:t>
+              <a:t>la mediana PONDERADA del gasto</a:t>
             </a:r>
             <a:endParaRPr lang="en-US" sz="1150" dirty="0"/>
           </a:p>
@@ -18367,7 +18445,7 @@
                 <a:ea typeface="Calibri" pitchFamily="34" charset="-122"/>
                 <a:cs typeface="Calibri" pitchFamily="34" charset="-120"/>
               </a:rPr>
-              <a:t>(la media es S/ 867)</a:t>
+              <a:t>(la muestral es S/ 681: hay que ponderar)</a:t>
             </a:r>
             <a:endParaRPr lang="en-US" sz="1150" dirty="0"/>
           </a:p>
@@ -18842,7 +18920,7 @@
                 <a:ea typeface="Calibri" pitchFamily="34" charset="-122"/>
                 <a:cs typeface="Calibri" pitchFamily="34" charset="-120"/>
               </a:rPr>
-              <a:t>Más de la mitad de los conglomerados son homogéneos: o todos sus hogares son pobres o ninguno lo es.</a:t>
+              <a:t>Un 42 % de los conglomerados son homogéneos: o todos sus hogares son pobres o ninguno lo es. Es una proporción enorme.</a:t>
             </a:r>
             <a:endParaRPr lang="en-US" sz="1150" dirty="0"/>
           </a:p>
@@ -19186,7 +19264,7 @@
                           <a:ea typeface="Calibri" pitchFamily="34" charset="-122"/>
                           <a:cs typeface="Calibri" pitchFamily="34" charset="-120"/>
                         </a:rPr>
-                        <a:t>Ingenuo — como en la Clase 4</a:t>
+                        <a:t>Ingenuo — muestreo aleatorio simple</a:t>
                       </a:r>
                       <a:endParaRPr lang="en-US" sz="1150" dirty="0">
                         <a:latin typeface="Calibri" charset="0"/>
@@ -19254,7 +19332,7 @@
                           <a:ea typeface="Calibri" pitchFamily="34" charset="-122"/>
                           <a:cs typeface="Calibri" pitchFamily="34" charset="-120"/>
                         </a:rPr>
-                        <a:t>0.219 pp</a:t>
+                        <a:t>0.243 pp</a:t>
                       </a:r>
                       <a:endParaRPr lang="en-US" sz="1150" dirty="0">
                         <a:latin typeface="Calibri" charset="0"/>
@@ -19322,7 +19400,7 @@
                           <a:ea typeface="Calibri" pitchFamily="34" charset="-122"/>
                           <a:cs typeface="Calibri" pitchFamily="34" charset="-120"/>
                         </a:rPr>
-                        <a:t>[27.15 %, 28.01 %]</a:t>
+                        <a:t>[27.10 %, 28.06 %]</a:t>
                       </a:r>
                       <a:endParaRPr lang="en-US" sz="1150" dirty="0">
                         <a:latin typeface="Calibri" charset="0"/>
@@ -19390,7 +19468,7 @@
                           <a:ea typeface="Calibri" pitchFamily="34" charset="-122"/>
                           <a:cs typeface="Calibri" pitchFamily="34" charset="-120"/>
                         </a:rPr>
-                        <a:t>0.86 pp</a:t>
+                        <a:t>0.95 pp</a:t>
                       </a:r>
                       <a:endParaRPr lang="en-US" sz="1150" dirty="0">
                         <a:latin typeface="Calibri" charset="0"/>
@@ -19807,7 +19885,7 @@
                 <a:ea typeface="Calibri" pitchFamily="34" charset="-122"/>
                 <a:cs typeface="Calibri" pitchFamily="34" charset="-120"/>
               </a:rPr>
-              <a:t>EFECTO DE DISEÑO:  DEFF = 5.76</a:t>
+              <a:t>EFECTO DE DISEÑO APROXIMADO:  DEFF ≈ 4.66</a:t>
             </a:r>
             <a:endParaRPr lang="en-US" sz="1600" dirty="0"/>
           </a:p>
@@ -19849,7 +19927,7 @@
                 <a:ea typeface="Calibri" pitchFamily="34" charset="-122"/>
                 <a:cs typeface="Calibri" pitchFamily="34" charset="-120"/>
               </a:rPr>
-              <a:t>El intervalo ingenuo es 2.40 veces más angosto de lo que corresponde. Y el tamaño de muestra EFECTIVO es de 5 845 hogares, no 33 691.</a:t>
+              <a:t>El intervalo ingenuo es 2.16 veces más angosto de lo que corresponde, y el tamaño de muestra EFECTIVO es de 7 238 hogares, no 33 691.</a:t>
             </a:r>
             <a:endParaRPr lang="en-US" sz="1200" dirty="0"/>
           </a:p>
@@ -19878,7 +19956,7 @@
                 <a:ea typeface="Calibri" pitchFamily="34" charset="-122"/>
                 <a:cs typeface="Calibri" pitchFamily="34" charset="-120"/>
               </a:rPr>
-              <a:t>Creías tener 33 691 hogares. Para efectos de precisión tienes 5 845.</a:t>
+              <a:t>Corrige por conglomeración; no incorpora explícitamente la estratificación, lo que lo hace conservador. Es una aproximación didáctica, no el error estándar oficial del INEI.</a:t>
             </a:r>
             <a:endParaRPr lang="en-US" sz="1200" dirty="0"/>
           </a:p>
@@ -21829,7 +21907,7 @@
                 <a:ea typeface="Calibri" pitchFamily="34" charset="-122"/>
                 <a:cs typeface="Calibri" pitchFamily="34" charset="-120"/>
               </a:rPr>
-              <a:t>«La pobreza bajó 1.5 pp. La caída alcanza significancia al 5 % por margen estrecho. Hay evidencia de mejora, pero no es concluyente con un solo año de comparación.»</a:t>
+              <a:t>«Bajo esta aproximación la caída alcanza el 5 % por margen estrecho. Es un resultado FRONTERIZO: al incorporar la covarianza del panel rotativo el p pasa a 0.034. Hay evidencia de mejora, no una reducción demostrada.»</a:t>
             </a:r>
             <a:endParaRPr lang="en-US" sz="1100" dirty="0"/>
           </a:p>

--- a/Taller_7/PPT/Taller_Pobreza_ENAHO.pptx
+++ b/Taller_7/PPT/Taller_Pobreza_ENAHO.pptx
@@ -2112,7 +2112,7 @@
           <a:p>
             <a:r>
               <a:rPr lang="en-US" dirty="0"/>
-              <a:t>Esta es LA slide del taller. Guion: primero las dos tarjetas de arriba (por qué se muestrea así y por qué eso importa), después la tabla, y deja el DEFF para el final. La frase que hay que decir despacio es la última: 'creías tener 33 691 hogares; para precisión tienes 5 845'. Y añade el matiz que evita que suene a crítica al INEI: el DEFF es el precio estadístico de un ahorro logístico enorme, y es una decisión deliberada y razonable. Lo que no es razonable es ignorarlo al calcular el intervalo.</a:t>
+              <a:t>Esta es LA slide del taller. Guion: primero las dos tarjetas de arriba (por qué se muestrea así y por qué eso importa), después la tabla, y deja el DEFF para el final. La frase que hay que decir despacio es la última: 'creías tener 33 691 hogares; para precisión tienes 7 238'. Y añade el matiz que evita que suene a crítica al INEI: el DEFF es el precio estadístico de un ahorro logístico enorme, y es una decisión deliberada y razonable. Lo que no es razonable es ignorarlo al calcular el intervalo.</a:t>
             </a:r>
             <a:endParaRPr lang="en-US" dirty="0"/>
           </a:p>
@@ -2200,7 +2200,7 @@
           <a:p>
             <a:r>
               <a:rPr lang="en-US" dirty="0"/>
-              <a:t>Deja los dos p-valores en pantalla y pregunta: '¿qué titular escribirían?'. El de la izquierda es el honesto. El de la derecha es el que saldría si nadie hubiera hecho el bloque 3. El intervalo es lo más elocuente: el límite superior es −0.03 pp. Tres centésimas. Y conecta con la Clase 5: un p de 0.046 no es lo mismo que un p de 0.0000027, aunque los dos 'sean significativos'. Esa distinción es la que separa un análisis de un titular.</a:t>
+              <a:t>Deja los dos p-valores en pantalla y pregunta: '¿qué titular escribirían?'. El de la izquierda es el honesto. El de la derecha es el que saldría si nadie hubiera hecho el bloque 3. El intervalo es lo más elocuente: el límite superior es −0.03 pp. Tres centésimas. Y conecta con la Clase 5: un p de 0.046 no es lo mismo que un p de 0.000023, aunque los dos 'sean significativos'. Esa distinción es la que separa un análisis de un titular.</a:t>
             </a:r>
             <a:endParaRPr lang="en-US" dirty="0"/>
           </a:p>
@@ -11806,7 +11806,7 @@
                 <a:ea typeface="Calibri" pitchFamily="34" charset="-122"/>
                 <a:cs typeface="Calibri" pitchFamily="34" charset="-120"/>
               </a:rPr>
-              <a:t>0.046 vs 0.0000027</a:t>
+              <a:t>0.046 vs 0.000023</a:t>
             </a:r>
             <a:endParaRPr lang="en-US" sz="1200" dirty="0"/>
           </a:p>
@@ -20266,7 +20266,7 @@
                 <a:ea typeface="Calibri" pitchFamily="34" charset="-122"/>
                 <a:cs typeface="Calibri" pitchFamily="34" charset="-120"/>
               </a:rPr>
-              <a:t>p = 0.0000027</a:t>
+              <a:t>p = 0.000023</a:t>
             </a:r>
             <a:endParaRPr lang="en-US" sz="3200" dirty="0"/>
           </a:p>
@@ -21480,7 +21480,7 @@
                           <a:ea typeface="Calibri" pitchFamily="34" charset="-122"/>
                           <a:cs typeface="Calibri" pitchFamily="34" charset="-120"/>
                         </a:rPr>
-                        <a:t>0.313 pp</a:t>
+                        <a:t>0.347 pp</a:t>
                       </a:r>
                       <a:endParaRPr lang="en-US" sz="1150" dirty="0">
                         <a:latin typeface="Calibri" charset="0"/>
@@ -21548,7 +21548,7 @@
                           <a:ea typeface="Calibri" pitchFamily="34" charset="-122"/>
                           <a:cs typeface="Calibri" pitchFamily="34" charset="-120"/>
                         </a:rPr>
-                        <a:t>−4.69</a:t>
+                        <a:t>−4.23</a:t>
                       </a:r>
                       <a:endParaRPr lang="en-US" sz="1150" dirty="0">
                         <a:latin typeface="Calibri" charset="0"/>
